--- a/class/cloud_infra_mgmt/10주차_Terraform_IaC심화/01_강의자료/2차시_TerraformCloud계정과워크스페이스.pptx
+++ b/class/cloud_infra_mgmt/10주차_Terraform_IaC심화/01_강의자료/2차시_TerraformCloud계정과워크스페이스.pptx
@@ -10499,7 +10499,7 @@
               </a:lnSpc>
             </a:pPr>
             <a:r>
-              <a:rPr sz="1500" b="1">
+              <a:rPr sz="1700" b="1">
                 <a:solidFill>
                   <a:srgbClr val="0D9488"/>
                 </a:solidFill>
@@ -10508,7 +10508,7 @@
               <a:t>●  </a:t>
             </a:r>
             <a:r>
-              <a:rPr sz="1500" b="0">
+              <a:rPr sz="1700" b="0">
                 <a:solidFill>
                   <a:srgbClr val="222733"/>
                 </a:solidFill>
@@ -10524,7 +10524,7 @@
               </a:lnSpc>
             </a:pPr>
             <a:r>
-              <a:rPr sz="1500" b="1">
+              <a:rPr sz="1700" b="1">
                 <a:solidFill>
                   <a:srgbClr val="0D9488"/>
                 </a:solidFill>
@@ -10533,7 +10533,7 @@
               <a:t>●  </a:t>
             </a:r>
             <a:r>
-              <a:rPr sz="1500" b="0">
+              <a:rPr sz="1700" b="0">
                 <a:solidFill>
                   <a:srgbClr val="222733"/>
                 </a:solidFill>
@@ -10549,7 +10549,7 @@
               </a:lnSpc>
             </a:pPr>
             <a:r>
-              <a:rPr sz="1500" b="1">
+              <a:rPr sz="1700" b="1">
                 <a:solidFill>
                   <a:srgbClr val="0D9488"/>
                 </a:solidFill>
@@ -10558,7 +10558,7 @@
               <a:t>●  </a:t>
             </a:r>
             <a:r>
-              <a:rPr sz="1500" b="0">
+              <a:rPr sz="1700" b="0">
                 <a:solidFill>
                   <a:srgbClr val="222733"/>
                 </a:solidFill>

--- a/class/cloud_infra_mgmt/10주차_Terraform_IaC심화/01_강의자료/2차시_TerraformCloud계정과워크스페이스.pptx
+++ b/class/cloud_infra_mgmt/10주차_Terraform_IaC심화/01_강의자료/2차시_TerraformCloud계정과워크스페이스.pptx
@@ -5357,7 +5357,7 @@
           <a:p>
             <a:pPr>
               <a:lnSpc>
-                <a:spcPct val="115000"/>
+                <a:spcPct val="149500"/>
               </a:lnSpc>
             </a:pPr>
             <a:r>
@@ -5382,7 +5382,7 @@
           <a:p>
             <a:pPr>
               <a:lnSpc>
-                <a:spcPct val="115000"/>
+                <a:spcPct val="149500"/>
               </a:lnSpc>
             </a:pPr>
             <a:r>
@@ -5407,7 +5407,7 @@
           <a:p>
             <a:pPr>
               <a:lnSpc>
-                <a:spcPct val="115000"/>
+                <a:spcPct val="149500"/>
               </a:lnSpc>
             </a:pPr>
             <a:r>
@@ -5432,7 +5432,7 @@
           <a:p>
             <a:pPr>
               <a:lnSpc>
-                <a:spcPct val="115000"/>
+                <a:spcPct val="149500"/>
               </a:lnSpc>
             </a:pPr>
             <a:r>
@@ -5457,7 +5457,7 @@
           <a:p>
             <a:pPr>
               <a:lnSpc>
-                <a:spcPct val="115000"/>
+                <a:spcPct val="149500"/>
               </a:lnSpc>
             </a:pPr>
             <a:r>
@@ -5482,7 +5482,7 @@
           <a:p>
             <a:pPr>
               <a:lnSpc>
-                <a:spcPct val="115000"/>
+                <a:spcPct val="149500"/>
               </a:lnSpc>
             </a:pPr>
             <a:r>
@@ -5507,7 +5507,7 @@
           <a:p>
             <a:pPr>
               <a:lnSpc>
-                <a:spcPct val="115000"/>
+                <a:spcPct val="149500"/>
               </a:lnSpc>
             </a:pPr>
             <a:r>
@@ -5898,7 +5898,7 @@
           <a:p>
             <a:pPr>
               <a:lnSpc>
-                <a:spcPct val="115000"/>
+                <a:spcPct val="149500"/>
               </a:lnSpc>
             </a:pPr>
             <a:r>
@@ -5923,7 +5923,7 @@
           <a:p>
             <a:pPr>
               <a:lnSpc>
-                <a:spcPct val="115000"/>
+                <a:spcPct val="149500"/>
               </a:lnSpc>
             </a:pPr>
             <a:r>
@@ -5948,7 +5948,7 @@
           <a:p>
             <a:pPr>
               <a:lnSpc>
-                <a:spcPct val="115000"/>
+                <a:spcPct val="149500"/>
               </a:lnSpc>
             </a:pPr>
             <a:r>
@@ -6339,7 +6339,7 @@
           <a:p>
             <a:pPr>
               <a:lnSpc>
-                <a:spcPct val="115000"/>
+                <a:spcPct val="149500"/>
               </a:lnSpc>
             </a:pPr>
             <a:r>
@@ -6364,7 +6364,7 @@
           <a:p>
             <a:pPr>
               <a:lnSpc>
-                <a:spcPct val="115000"/>
+                <a:spcPct val="149500"/>
               </a:lnSpc>
             </a:pPr>
             <a:r>
@@ -6389,7 +6389,7 @@
           <a:p>
             <a:pPr>
               <a:lnSpc>
-                <a:spcPct val="115000"/>
+                <a:spcPct val="149500"/>
               </a:lnSpc>
             </a:pPr>
             <a:r>
@@ -6414,7 +6414,7 @@
           <a:p>
             <a:pPr>
               <a:lnSpc>
-                <a:spcPct val="115000"/>
+                <a:spcPct val="149500"/>
               </a:lnSpc>
             </a:pPr>
             <a:r>
@@ -7663,16 +7663,104 @@
       </p:sp>
       <p:sp>
         <p:nvSpPr>
-          <p:cNvPr id="7" name="Isosceles Triangle 6"/>
+          <p:cNvPr id="7" name="Rectangle 6"/>
           <p:cNvSpPr/>
           <p:nvPr/>
         </p:nvSpPr>
         <p:spPr>
-          <a:xfrm rot="5400000">
-            <a:off x="3495751" y="1673352"/>
-            <a:ext cx="146304" cy="146304"/>
-          </a:xfrm>
-          <a:prstGeom prst="triangle">
+          <a:xfrm>
+            <a:off x="5096865" y="1730959"/>
+            <a:ext cx="1995220" cy="31089"/>
+          </a:xfrm>
+          <a:prstGeom prst="rect">
+            <a:avLst/>
+          </a:prstGeom>
+          <a:solidFill>
+            <a:srgbClr val="14B8A6"/>
+          </a:solidFill>
+          <a:ln>
+            <a:noFill/>
+          </a:ln>
+          <a:effectLst/>
+        </p:spPr>
+        <p:style>
+          <a:lnRef idx="1">
+            <a:schemeClr val="accent1"/>
+          </a:lnRef>
+          <a:fillRef idx="3">
+            <a:schemeClr val="accent1"/>
+          </a:fillRef>
+          <a:effectRef idx="2">
+            <a:schemeClr val="accent1"/>
+          </a:effectRef>
+          <a:fontRef idx="minor">
+            <a:schemeClr val="lt1"/>
+          </a:fontRef>
+        </p:style>
+        <p:txBody>
+          <a:bodyPr rtlCol="0" anchor="ctr"/>
+          <a:lstStyle/>
+          <a:p>
+            <a:pPr algn="ctr"/>
+          </a:p>
+        </p:txBody>
+      </p:sp>
+      <p:sp>
+        <p:nvSpPr>
+          <p:cNvPr id="8" name="Rectangle 7"/>
+          <p:cNvSpPr/>
+          <p:nvPr/>
+        </p:nvSpPr>
+        <p:spPr>
+          <a:xfrm>
+            <a:off x="7622438" y="1730959"/>
+            <a:ext cx="1995220" cy="31089"/>
+          </a:xfrm>
+          <a:prstGeom prst="rect">
+            <a:avLst/>
+          </a:prstGeom>
+          <a:solidFill>
+            <a:srgbClr val="14B8A6"/>
+          </a:solidFill>
+          <a:ln>
+            <a:noFill/>
+          </a:ln>
+          <a:effectLst/>
+        </p:spPr>
+        <p:style>
+          <a:lnRef idx="1">
+            <a:schemeClr val="accent1"/>
+          </a:lnRef>
+          <a:fillRef idx="3">
+            <a:schemeClr val="accent1"/>
+          </a:fillRef>
+          <a:effectRef idx="2">
+            <a:schemeClr val="accent1"/>
+          </a:effectRef>
+          <a:fontRef idx="minor">
+            <a:schemeClr val="lt1"/>
+          </a:fontRef>
+        </p:style>
+        <p:txBody>
+          <a:bodyPr rtlCol="0" anchor="ctr"/>
+          <a:lstStyle/>
+          <a:p>
+            <a:pPr algn="ctr"/>
+          </a:p>
+        </p:txBody>
+      </p:sp>
+      <p:sp>
+        <p:nvSpPr>
+          <p:cNvPr id="9" name="Oval 8"/>
+          <p:cNvSpPr/>
+          <p:nvPr/>
+        </p:nvSpPr>
+        <p:spPr>
+          <a:xfrm>
+            <a:off x="2040940" y="1481328"/>
+            <a:ext cx="530352" cy="530352"/>
+          </a:xfrm>
+          <a:prstGeom prst="ellipse">
             <a:avLst/>
           </a:prstGeom>
           <a:solidFill>
@@ -7707,227 +7795,7 @@
       </p:sp>
       <p:sp>
         <p:nvSpPr>
-          <p:cNvPr id="8" name="Rectangle 7"/>
-          <p:cNvSpPr/>
-          <p:nvPr/>
-        </p:nvSpPr>
-        <p:spPr>
-          <a:xfrm>
-            <a:off x="5096865" y="1730959"/>
-            <a:ext cx="1995220" cy="31089"/>
-          </a:xfrm>
-          <a:prstGeom prst="rect">
-            <a:avLst/>
-          </a:prstGeom>
-          <a:solidFill>
-            <a:srgbClr val="14B8A6"/>
-          </a:solidFill>
-          <a:ln>
-            <a:noFill/>
-          </a:ln>
-          <a:effectLst/>
-        </p:spPr>
-        <p:style>
-          <a:lnRef idx="1">
-            <a:schemeClr val="accent1"/>
-          </a:lnRef>
-          <a:fillRef idx="3">
-            <a:schemeClr val="accent1"/>
-          </a:fillRef>
-          <a:effectRef idx="2">
-            <a:schemeClr val="accent1"/>
-          </a:effectRef>
-          <a:fontRef idx="minor">
-            <a:schemeClr val="lt1"/>
-          </a:fontRef>
-        </p:style>
-        <p:txBody>
-          <a:bodyPr rtlCol="0" anchor="ctr"/>
-          <a:lstStyle/>
-          <a:p>
-            <a:pPr algn="ctr"/>
-          </a:p>
-        </p:txBody>
-      </p:sp>
-      <p:sp>
-        <p:nvSpPr>
-          <p:cNvPr id="9" name="Isosceles Triangle 8"/>
-          <p:cNvSpPr/>
-          <p:nvPr/>
-        </p:nvSpPr>
-        <p:spPr>
-          <a:xfrm rot="5400000">
-            <a:off x="6021324" y="1673352"/>
-            <a:ext cx="146304" cy="146304"/>
-          </a:xfrm>
-          <a:prstGeom prst="triangle">
-            <a:avLst/>
-          </a:prstGeom>
-          <a:solidFill>
-            <a:srgbClr val="0D9488"/>
-          </a:solidFill>
-          <a:ln>
-            <a:noFill/>
-          </a:ln>
-          <a:effectLst/>
-        </p:spPr>
-        <p:style>
-          <a:lnRef idx="1">
-            <a:schemeClr val="accent1"/>
-          </a:lnRef>
-          <a:fillRef idx="3">
-            <a:schemeClr val="accent1"/>
-          </a:fillRef>
-          <a:effectRef idx="2">
-            <a:schemeClr val="accent1"/>
-          </a:effectRef>
-          <a:fontRef idx="minor">
-            <a:schemeClr val="lt1"/>
-          </a:fontRef>
-        </p:style>
-        <p:txBody>
-          <a:bodyPr rtlCol="0" anchor="ctr"/>
-          <a:lstStyle/>
-          <a:p>
-            <a:pPr algn="ctr"/>
-          </a:p>
-        </p:txBody>
-      </p:sp>
-      <p:sp>
-        <p:nvSpPr>
-          <p:cNvPr id="10" name="Rectangle 9"/>
-          <p:cNvSpPr/>
-          <p:nvPr/>
-        </p:nvSpPr>
-        <p:spPr>
-          <a:xfrm>
-            <a:off x="7622438" y="1730959"/>
-            <a:ext cx="1995220" cy="31089"/>
-          </a:xfrm>
-          <a:prstGeom prst="rect">
-            <a:avLst/>
-          </a:prstGeom>
-          <a:solidFill>
-            <a:srgbClr val="14B8A6"/>
-          </a:solidFill>
-          <a:ln>
-            <a:noFill/>
-          </a:ln>
-          <a:effectLst/>
-        </p:spPr>
-        <p:style>
-          <a:lnRef idx="1">
-            <a:schemeClr val="accent1"/>
-          </a:lnRef>
-          <a:fillRef idx="3">
-            <a:schemeClr val="accent1"/>
-          </a:fillRef>
-          <a:effectRef idx="2">
-            <a:schemeClr val="accent1"/>
-          </a:effectRef>
-          <a:fontRef idx="minor">
-            <a:schemeClr val="lt1"/>
-          </a:fontRef>
-        </p:style>
-        <p:txBody>
-          <a:bodyPr rtlCol="0" anchor="ctr"/>
-          <a:lstStyle/>
-          <a:p>
-            <a:pPr algn="ctr"/>
-          </a:p>
-        </p:txBody>
-      </p:sp>
-      <p:sp>
-        <p:nvSpPr>
-          <p:cNvPr id="11" name="Isosceles Triangle 10"/>
-          <p:cNvSpPr/>
-          <p:nvPr/>
-        </p:nvSpPr>
-        <p:spPr>
-          <a:xfrm rot="5400000">
-            <a:off x="8546896" y="1673352"/>
-            <a:ext cx="146304" cy="146304"/>
-          </a:xfrm>
-          <a:prstGeom prst="triangle">
-            <a:avLst/>
-          </a:prstGeom>
-          <a:solidFill>
-            <a:srgbClr val="0D9488"/>
-          </a:solidFill>
-          <a:ln>
-            <a:noFill/>
-          </a:ln>
-          <a:effectLst/>
-        </p:spPr>
-        <p:style>
-          <a:lnRef idx="1">
-            <a:schemeClr val="accent1"/>
-          </a:lnRef>
-          <a:fillRef idx="3">
-            <a:schemeClr val="accent1"/>
-          </a:fillRef>
-          <a:effectRef idx="2">
-            <a:schemeClr val="accent1"/>
-          </a:effectRef>
-          <a:fontRef idx="minor">
-            <a:schemeClr val="lt1"/>
-          </a:fontRef>
-        </p:style>
-        <p:txBody>
-          <a:bodyPr rtlCol="0" anchor="ctr"/>
-          <a:lstStyle/>
-          <a:p>
-            <a:pPr algn="ctr"/>
-          </a:p>
-        </p:txBody>
-      </p:sp>
-      <p:sp>
-        <p:nvSpPr>
-          <p:cNvPr id="12" name="Oval 11"/>
-          <p:cNvSpPr/>
-          <p:nvPr/>
-        </p:nvSpPr>
-        <p:spPr>
-          <a:xfrm>
-            <a:off x="2040940" y="1481328"/>
-            <a:ext cx="530352" cy="530352"/>
-          </a:xfrm>
-          <a:prstGeom prst="ellipse">
-            <a:avLst/>
-          </a:prstGeom>
-          <a:solidFill>
-            <a:srgbClr val="0D9488"/>
-          </a:solidFill>
-          <a:ln>
-            <a:noFill/>
-          </a:ln>
-          <a:effectLst/>
-        </p:spPr>
-        <p:style>
-          <a:lnRef idx="1">
-            <a:schemeClr val="accent1"/>
-          </a:lnRef>
-          <a:fillRef idx="3">
-            <a:schemeClr val="accent1"/>
-          </a:fillRef>
-          <a:effectRef idx="2">
-            <a:schemeClr val="accent1"/>
-          </a:effectRef>
-          <a:fontRef idx="minor">
-            <a:schemeClr val="lt1"/>
-          </a:fontRef>
-        </p:style>
-        <p:txBody>
-          <a:bodyPr rtlCol="0" anchor="ctr"/>
-          <a:lstStyle/>
-          <a:p>
-            <a:pPr algn="ctr"/>
-          </a:p>
-        </p:txBody>
-      </p:sp>
-      <p:sp>
-        <p:nvSpPr>
-          <p:cNvPr id="13" name="TextBox 12"/>
+          <p:cNvPr id="10" name="TextBox 9"/>
           <p:cNvSpPr txBox="1"/>
           <p:nvPr/>
         </p:nvSpPr>
@@ -7962,7 +7830,7 @@
       </p:sp>
       <p:sp>
         <p:nvSpPr>
-          <p:cNvPr id="14" name="Rounded Rectangle 13"/>
+          <p:cNvPr id="11" name="Rounded Rectangle 10"/>
           <p:cNvSpPr/>
           <p:nvPr/>
         </p:nvSpPr>
@@ -8010,7 +7878,7 @@
       </p:sp>
       <p:sp>
         <p:nvSpPr>
-          <p:cNvPr id="15" name="TextBox 14"/>
+          <p:cNvPr id="12" name="TextBox 11"/>
           <p:cNvSpPr txBox="1"/>
           <p:nvPr/>
         </p:nvSpPr>
@@ -8045,7 +7913,7 @@
       </p:sp>
       <p:sp>
         <p:nvSpPr>
-          <p:cNvPr id="16" name="TextBox 15"/>
+          <p:cNvPr id="13" name="TextBox 12"/>
           <p:cNvSpPr txBox="1"/>
           <p:nvPr/>
         </p:nvSpPr>
@@ -8084,7 +7952,7 @@
       </p:sp>
       <p:sp>
         <p:nvSpPr>
-          <p:cNvPr id="17" name="Oval 16"/>
+          <p:cNvPr id="14" name="Oval 13"/>
           <p:cNvSpPr/>
           <p:nvPr/>
         </p:nvSpPr>
@@ -8128,7 +7996,7 @@
       </p:sp>
       <p:sp>
         <p:nvSpPr>
-          <p:cNvPr id="18" name="TextBox 17"/>
+          <p:cNvPr id="15" name="TextBox 14"/>
           <p:cNvSpPr txBox="1"/>
           <p:nvPr/>
         </p:nvSpPr>
@@ -8163,7 +8031,7 @@
       </p:sp>
       <p:sp>
         <p:nvSpPr>
-          <p:cNvPr id="19" name="Rounded Rectangle 18"/>
+          <p:cNvPr id="16" name="Rounded Rectangle 15"/>
           <p:cNvSpPr/>
           <p:nvPr/>
         </p:nvSpPr>
@@ -8211,7 +8079,7 @@
       </p:sp>
       <p:sp>
         <p:nvSpPr>
-          <p:cNvPr id="20" name="TextBox 19"/>
+          <p:cNvPr id="17" name="TextBox 16"/>
           <p:cNvSpPr txBox="1"/>
           <p:nvPr/>
         </p:nvSpPr>
@@ -8246,7 +8114,7 @@
       </p:sp>
       <p:sp>
         <p:nvSpPr>
-          <p:cNvPr id="21" name="TextBox 20"/>
+          <p:cNvPr id="18" name="TextBox 17"/>
           <p:cNvSpPr txBox="1"/>
           <p:nvPr/>
         </p:nvSpPr>
@@ -8285,7 +8153,7 @@
       </p:sp>
       <p:sp>
         <p:nvSpPr>
-          <p:cNvPr id="22" name="Oval 21"/>
+          <p:cNvPr id="19" name="Oval 18"/>
           <p:cNvSpPr/>
           <p:nvPr/>
         </p:nvSpPr>
@@ -8329,7 +8197,7 @@
       </p:sp>
       <p:sp>
         <p:nvSpPr>
-          <p:cNvPr id="23" name="TextBox 22"/>
+          <p:cNvPr id="20" name="TextBox 19"/>
           <p:cNvSpPr txBox="1"/>
           <p:nvPr/>
         </p:nvSpPr>
@@ -8364,7 +8232,7 @@
       </p:sp>
       <p:sp>
         <p:nvSpPr>
-          <p:cNvPr id="24" name="Rounded Rectangle 23"/>
+          <p:cNvPr id="21" name="Rounded Rectangle 20"/>
           <p:cNvSpPr/>
           <p:nvPr/>
         </p:nvSpPr>
@@ -8412,7 +8280,7 @@
       </p:sp>
       <p:sp>
         <p:nvSpPr>
-          <p:cNvPr id="25" name="TextBox 24"/>
+          <p:cNvPr id="22" name="TextBox 21"/>
           <p:cNvSpPr txBox="1"/>
           <p:nvPr/>
         </p:nvSpPr>
@@ -8447,7 +8315,7 @@
       </p:sp>
       <p:sp>
         <p:nvSpPr>
-          <p:cNvPr id="26" name="TextBox 25"/>
+          <p:cNvPr id="23" name="TextBox 22"/>
           <p:cNvSpPr txBox="1"/>
           <p:nvPr/>
         </p:nvSpPr>
@@ -8486,7 +8354,7 @@
       </p:sp>
       <p:sp>
         <p:nvSpPr>
-          <p:cNvPr id="27" name="Oval 26"/>
+          <p:cNvPr id="24" name="Oval 23"/>
           <p:cNvSpPr/>
           <p:nvPr/>
         </p:nvSpPr>
@@ -8530,7 +8398,7 @@
       </p:sp>
       <p:sp>
         <p:nvSpPr>
-          <p:cNvPr id="28" name="TextBox 27"/>
+          <p:cNvPr id="25" name="TextBox 24"/>
           <p:cNvSpPr txBox="1"/>
           <p:nvPr/>
         </p:nvSpPr>
@@ -8565,7 +8433,7 @@
       </p:sp>
       <p:sp>
         <p:nvSpPr>
-          <p:cNvPr id="29" name="Rounded Rectangle 28"/>
+          <p:cNvPr id="26" name="Rounded Rectangle 25"/>
           <p:cNvSpPr/>
           <p:nvPr/>
         </p:nvSpPr>
@@ -8613,7 +8481,7 @@
       </p:sp>
       <p:sp>
         <p:nvSpPr>
-          <p:cNvPr id="30" name="TextBox 29"/>
+          <p:cNvPr id="27" name="TextBox 26"/>
           <p:cNvSpPr txBox="1"/>
           <p:nvPr/>
         </p:nvSpPr>
@@ -8648,7 +8516,7 @@
       </p:sp>
       <p:sp>
         <p:nvSpPr>
-          <p:cNvPr id="31" name="TextBox 30"/>
+          <p:cNvPr id="28" name="TextBox 27"/>
           <p:cNvSpPr txBox="1"/>
           <p:nvPr/>
         </p:nvSpPr>
@@ -8687,7 +8555,7 @@
       </p:sp>
       <p:sp>
         <p:nvSpPr>
-          <p:cNvPr id="32" name="TextBox 31"/>
+          <p:cNvPr id="29" name="TextBox 28"/>
           <p:cNvSpPr txBox="1"/>
           <p:nvPr/>
         </p:nvSpPr>
@@ -8722,7 +8590,7 @@
       </p:sp>
       <p:sp>
         <p:nvSpPr>
-          <p:cNvPr id="33" name="TextBox 32"/>
+          <p:cNvPr id="30" name="TextBox 29"/>
           <p:cNvSpPr txBox="1"/>
           <p:nvPr/>
         </p:nvSpPr>
@@ -8757,7 +8625,7 @@
       </p:sp>
       <p:sp>
         <p:nvSpPr>
-          <p:cNvPr id="34" name="Rectangle 33"/>
+          <p:cNvPr id="31" name="Rectangle 30"/>
           <p:cNvSpPr/>
           <p:nvPr/>
         </p:nvSpPr>
@@ -9281,7 +9149,7 @@
           <a:p>
             <a:pPr>
               <a:lnSpc>
-                <a:spcPct val="115000"/>
+                <a:spcPct val="149500"/>
               </a:lnSpc>
             </a:pPr>
             <a:r>
@@ -9297,7 +9165,7 @@
           <a:p>
             <a:pPr>
               <a:lnSpc>
-                <a:spcPct val="115000"/>
+                <a:spcPct val="149500"/>
               </a:lnSpc>
             </a:pPr>
             <a:r>
@@ -9313,7 +9181,7 @@
           <a:p>
             <a:pPr>
               <a:lnSpc>
-                <a:spcPct val="115000"/>
+                <a:spcPct val="149500"/>
               </a:lnSpc>
             </a:pPr>
             <a:r>
@@ -9329,7 +9197,7 @@
           <a:p>
             <a:pPr>
               <a:lnSpc>
-                <a:spcPct val="115000"/>
+                <a:spcPct val="149500"/>
               </a:lnSpc>
             </a:pPr>
             <a:r>
@@ -9711,7 +9579,7 @@
           <a:p>
             <a:pPr>
               <a:lnSpc>
-                <a:spcPct val="115000"/>
+                <a:spcPct val="149500"/>
               </a:lnSpc>
             </a:pPr>
             <a:r>
@@ -9736,7 +9604,7 @@
           <a:p>
             <a:pPr>
               <a:lnSpc>
-                <a:spcPct val="115000"/>
+                <a:spcPct val="149500"/>
               </a:lnSpc>
             </a:pPr>
             <a:r>
@@ -9761,7 +9629,7 @@
           <a:p>
             <a:pPr>
               <a:lnSpc>
-                <a:spcPct val="115000"/>
+                <a:spcPct val="149500"/>
               </a:lnSpc>
             </a:pPr>
             <a:r>
@@ -10495,7 +10363,7 @@
           <a:p>
             <a:pPr>
               <a:lnSpc>
-                <a:spcPct val="115000"/>
+                <a:spcPct val="149500"/>
               </a:lnSpc>
             </a:pPr>
             <a:r>
@@ -10520,7 +10388,7 @@
           <a:p>
             <a:pPr>
               <a:lnSpc>
-                <a:spcPct val="115000"/>
+                <a:spcPct val="149500"/>
               </a:lnSpc>
             </a:pPr>
             <a:r>
@@ -10545,7 +10413,7 @@
           <a:p>
             <a:pPr>
               <a:lnSpc>
-                <a:spcPct val="115000"/>
+                <a:spcPct val="149500"/>
               </a:lnSpc>
             </a:pPr>
             <a:r>
@@ -11208,7 +11076,7 @@
           <a:p>
             <a:pPr>
               <a:lnSpc>
-                <a:spcPct val="115000"/>
+                <a:spcPct val="149500"/>
               </a:lnSpc>
             </a:pPr>
             <a:r>
@@ -11233,7 +11101,7 @@
           <a:p>
             <a:pPr>
               <a:lnSpc>
-                <a:spcPct val="115000"/>
+                <a:spcPct val="149500"/>
               </a:lnSpc>
             </a:pPr>
             <a:r>
@@ -11258,7 +11126,7 @@
           <a:p>
             <a:pPr>
               <a:lnSpc>
-                <a:spcPct val="115000"/>
+                <a:spcPct val="149500"/>
               </a:lnSpc>
             </a:pPr>
             <a:r>

--- a/class/cloud_infra_mgmt/10주차_Terraform_IaC심화/01_강의자료/2차시_TerraformCloud계정과워크스페이스.pptx
+++ b/class/cloud_infra_mgmt/10주차_Terraform_IaC심화/01_강의자료/2차시_TerraformCloud계정과워크스페이스.pptx
@@ -4993,6 +4993,8 @@
                   <a:srgbClr val="14B8A6"/>
                 </a:solidFill>
                 <a:latin typeface="맑은 고딕"/>
+                <a:ea typeface="맑은 고딕"/>
+                <a:cs typeface="맑은 고딕"/>
               </a:rPr>
               <a:t>클라우드인프라관리  ·  10주차 2차시</a:t>
             </a:r>
@@ -5028,6 +5030,8 @@
                   <a:srgbClr val="FFFFFF"/>
                 </a:solidFill>
                 <a:latin typeface="맑은 고딕"/>
+                <a:ea typeface="맑은 고딕"/>
+                <a:cs typeface="맑은 고딕"/>
               </a:rPr>
               <a:t>Terraform Cloud 계정·워크스페이스 생성</a:t>
             </a:r>
@@ -5063,6 +5067,8 @@
                   <a:srgbClr val="C9D3E6"/>
                 </a:solidFill>
                 <a:latin typeface="맑은 고딕"/>
+                <a:ea typeface="맑은 고딕"/>
+                <a:cs typeface="맑은 고딕"/>
               </a:rPr>
               <a:t>가입부터 워크스페이스 연결까지 단계별로</a:t>
             </a:r>
@@ -5098,6 +5104,8 @@
                   <a:srgbClr val="FFFFFF"/>
                 </a:solidFill>
                 <a:latin typeface="맑은 고딕"/>
+                <a:ea typeface="맑은 고딕"/>
+                <a:cs typeface="맑은 고딕"/>
               </a:rPr>
               <a:t>영남이공대학교 김지윤교수</a:t>
             </a:r>
@@ -5257,6 +5265,8 @@
                   <a:srgbClr val="14213D"/>
                 </a:solidFill>
                 <a:latin typeface="맑은 고딕"/>
+                <a:ea typeface="맑은 고딕"/>
+                <a:cs typeface="맑은 고딕"/>
               </a:rPr>
               <a:t>01</a:t>
             </a:r>
@@ -5292,6 +5302,8 @@
                   <a:srgbClr val="14B8A6"/>
                 </a:solidFill>
                 <a:latin typeface="맑은 고딕"/>
+                <a:ea typeface="맑은 고딕"/>
+                <a:cs typeface="맑은 고딕"/>
               </a:rPr>
               <a:t>PART 1 · 워크스페이스</a:t>
             </a:r>
@@ -5327,6 +5339,8 @@
                   <a:srgbClr val="FFFFFF"/>
                 </a:solidFill>
                 <a:latin typeface="맑은 고딕"/>
+                <a:ea typeface="맑은 고딕"/>
+                <a:cs typeface="맑은 고딕"/>
               </a:rPr>
               <a:t>main.tf의 cloud 블록</a:t>
             </a:r>
@@ -5366,6 +5380,8 @@
                   <a:srgbClr val="0D9488"/>
                 </a:solidFill>
                 <a:latin typeface="맑은 고딕"/>
+                <a:ea typeface="맑은 고딕"/>
+                <a:cs typeface="맑은 고딕"/>
               </a:rPr>
               <a:t>●  </a:t>
             </a:r>
@@ -5375,6 +5391,8 @@
                   <a:srgbClr val="222733"/>
                 </a:solidFill>
                 <a:latin typeface="맑은 고딕"/>
+                <a:ea typeface="맑은 고딕"/>
+                <a:cs typeface="맑은 고딕"/>
               </a:rPr>
               <a:t>terraform {</a:t>
             </a:r>
@@ -5391,6 +5409,8 @@
                   <a:srgbClr val="0D9488"/>
                 </a:solidFill>
                 <a:latin typeface="맑은 고딕"/>
+                <a:ea typeface="맑은 고딕"/>
+                <a:cs typeface="맑은 고딕"/>
               </a:rPr>
               <a:t>●  </a:t>
             </a:r>
@@ -5400,6 +5420,8 @@
                   <a:srgbClr val="222733"/>
                 </a:solidFill>
                 <a:latin typeface="맑은 고딕"/>
+                <a:ea typeface="맑은 고딕"/>
+                <a:cs typeface="맑은 고딕"/>
               </a:rPr>
               <a:t>  cloud {</a:t>
             </a:r>
@@ -5416,6 +5438,8 @@
                   <a:srgbClr val="0D9488"/>
                 </a:solidFill>
                 <a:latin typeface="맑은 고딕"/>
+                <a:ea typeface="맑은 고딕"/>
+                <a:cs typeface="맑은 고딕"/>
               </a:rPr>
               <a:t>●  </a:t>
             </a:r>
@@ -5425,6 +5449,8 @@
                   <a:srgbClr val="222733"/>
                 </a:solidFill>
                 <a:latin typeface="맑은 고딕"/>
+                <a:ea typeface="맑은 고딕"/>
+                <a:cs typeface="맑은 고딕"/>
               </a:rPr>
               <a:t>    organization = "my-org"</a:t>
             </a:r>
@@ -5441,6 +5467,8 @@
                   <a:srgbClr val="0D9488"/>
                 </a:solidFill>
                 <a:latin typeface="맑은 고딕"/>
+                <a:ea typeface="맑은 고딕"/>
+                <a:cs typeface="맑은 고딕"/>
               </a:rPr>
               <a:t>●  </a:t>
             </a:r>
@@ -5450,6 +5478,8 @@
                   <a:srgbClr val="222733"/>
                 </a:solidFill>
                 <a:latin typeface="맑은 고딕"/>
+                <a:ea typeface="맑은 고딕"/>
+                <a:cs typeface="맑은 고딕"/>
               </a:rPr>
               <a:t>    workspaces { name = "cloud-lab" }</a:t>
             </a:r>
@@ -5466,6 +5496,8 @@
                   <a:srgbClr val="0D9488"/>
                 </a:solidFill>
                 <a:latin typeface="맑은 고딕"/>
+                <a:ea typeface="맑은 고딕"/>
+                <a:cs typeface="맑은 고딕"/>
               </a:rPr>
               <a:t>●  </a:t>
             </a:r>
@@ -5475,6 +5507,8 @@
                   <a:srgbClr val="222733"/>
                 </a:solidFill>
                 <a:latin typeface="맑은 고딕"/>
+                <a:ea typeface="맑은 고딕"/>
+                <a:cs typeface="맑은 고딕"/>
               </a:rPr>
               <a:t>  }</a:t>
             </a:r>
@@ -5491,6 +5525,8 @@
                   <a:srgbClr val="0D9488"/>
                 </a:solidFill>
                 <a:latin typeface="맑은 고딕"/>
+                <a:ea typeface="맑은 고딕"/>
+                <a:cs typeface="맑은 고딕"/>
               </a:rPr>
               <a:t>●  </a:t>
             </a:r>
@@ -5500,6 +5536,8 @@
                   <a:srgbClr val="222733"/>
                 </a:solidFill>
                 <a:latin typeface="맑은 고딕"/>
+                <a:ea typeface="맑은 고딕"/>
+                <a:cs typeface="맑은 고딕"/>
               </a:rPr>
               <a:t>}</a:t>
             </a:r>
@@ -5516,6 +5554,8 @@
                   <a:srgbClr val="0D9488"/>
                 </a:solidFill>
                 <a:latin typeface="맑은 고딕"/>
+                <a:ea typeface="맑은 고딕"/>
+                <a:cs typeface="맑은 고딕"/>
               </a:rPr>
               <a:t>●  </a:t>
             </a:r>
@@ -5525,6 +5565,8 @@
                   <a:srgbClr val="222733"/>
                 </a:solidFill>
                 <a:latin typeface="맑은 고딕"/>
+                <a:ea typeface="맑은 고딕"/>
+                <a:cs typeface="맑은 고딕"/>
               </a:rPr>
               <a:t>→ 이 블록이 있으면 State가 로컬이 아니라 지정한 워크스페이스에 저장됨</a:t>
             </a:r>
@@ -5560,6 +5602,8 @@
                   <a:srgbClr val="5B6373"/>
                 </a:solidFill>
                 <a:latin typeface="맑은 고딕"/>
+                <a:ea typeface="맑은 고딕"/>
+                <a:cs typeface="맑은 고딕"/>
               </a:rPr>
               <a:t>클라우드인프라관리  ·  10주차 2차시</a:t>
             </a:r>
@@ -5595,6 +5639,8 @@
                   <a:srgbClr val="5B6373"/>
                 </a:solidFill>
                 <a:latin typeface="맑은 고딕"/>
+                <a:ea typeface="맑은 고딕"/>
+                <a:cs typeface="맑은 고딕"/>
               </a:rPr>
               <a:t>10 / 14</a:t>
             </a:r>
@@ -5798,6 +5844,8 @@
                   <a:srgbClr val="14213D"/>
                 </a:solidFill>
                 <a:latin typeface="맑은 고딕"/>
+                <a:ea typeface="맑은 고딕"/>
+                <a:cs typeface="맑은 고딕"/>
               </a:rPr>
               <a:t>02</a:t>
             </a:r>
@@ -5833,6 +5881,8 @@
                   <a:srgbClr val="14B8A6"/>
                 </a:solidFill>
                 <a:latin typeface="맑은 고딕"/>
+                <a:ea typeface="맑은 고딕"/>
+                <a:cs typeface="맑은 고딕"/>
               </a:rPr>
               <a:t>실습 안내</a:t>
             </a:r>
@@ -5868,6 +5918,8 @@
                   <a:srgbClr val="FFFFFF"/>
                 </a:solidFill>
                 <a:latin typeface="맑은 고딕"/>
+                <a:ea typeface="맑은 고딕"/>
+                <a:cs typeface="맑은 고딕"/>
               </a:rPr>
               <a:t>Killercoda — 워크스페이스 구조 탐색</a:t>
             </a:r>
@@ -5907,6 +5959,8 @@
                   <a:srgbClr val="0D9488"/>
                 </a:solidFill>
                 <a:latin typeface="맑은 고딕"/>
+                <a:ea typeface="맑은 고딕"/>
+                <a:cs typeface="맑은 고딕"/>
               </a:rPr>
               <a:t>●  </a:t>
             </a:r>
@@ -5916,6 +5970,8 @@
                   <a:srgbClr val="222733"/>
                 </a:solidFill>
                 <a:latin typeface="맑은 고딕"/>
+                <a:ea typeface="맑은 고딕"/>
+                <a:cs typeface="맑은 고딕"/>
               </a:rPr>
               <a:t>교수자가 미리 만들어 둔 예시 워크스페이스 화면을 함께 살펴봄</a:t>
             </a:r>
@@ -5932,6 +5988,8 @@
                   <a:srgbClr val="0D9488"/>
                 </a:solidFill>
                 <a:latin typeface="맑은 고딕"/>
+                <a:ea typeface="맑은 고딕"/>
+                <a:cs typeface="맑은 고딕"/>
               </a:rPr>
               <a:t>●  </a:t>
             </a:r>
@@ -5941,6 +5999,8 @@
                   <a:srgbClr val="222733"/>
                 </a:solidFill>
                 <a:latin typeface="맑은 고딕"/>
+                <a:ea typeface="맑은 고딕"/>
+                <a:cs typeface="맑은 고딕"/>
               </a:rPr>
               <a:t>Overview / States / Runs / Variables 탭이 각각 무엇을 보여주는지 확인</a:t>
             </a:r>
@@ -5957,6 +6017,8 @@
                   <a:srgbClr val="0D9488"/>
                 </a:solidFill>
                 <a:latin typeface="맑은 고딕"/>
+                <a:ea typeface="맑은 고딕"/>
+                <a:cs typeface="맑은 고딕"/>
               </a:rPr>
               <a:t>●  </a:t>
             </a:r>
@@ -5966,6 +6028,8 @@
                   <a:srgbClr val="222733"/>
                 </a:solidFill>
                 <a:latin typeface="맑은 고딕"/>
+                <a:ea typeface="맑은 고딕"/>
+                <a:cs typeface="맑은 고딕"/>
               </a:rPr>
               <a:t>실제 코드 실행 없이, 워크스페이스 UI 구조에 먼저 익숙해지는 시간</a:t>
             </a:r>
@@ -6001,6 +6065,8 @@
                   <a:srgbClr val="5B6373"/>
                 </a:solidFill>
                 <a:latin typeface="맑은 고딕"/>
+                <a:ea typeface="맑은 고딕"/>
+                <a:cs typeface="맑은 고딕"/>
               </a:rPr>
               <a:t>클라우드인프라관리  ·  10주차 2차시</a:t>
             </a:r>
@@ -6036,6 +6102,8 @@
                   <a:srgbClr val="5B6373"/>
                 </a:solidFill>
                 <a:latin typeface="맑은 고딕"/>
+                <a:ea typeface="맑은 고딕"/>
+                <a:cs typeface="맑은 고딕"/>
               </a:rPr>
               <a:t>11 / 14</a:t>
             </a:r>
@@ -6239,6 +6307,8 @@
                   <a:srgbClr val="14213D"/>
                 </a:solidFill>
                 <a:latin typeface="맑은 고딕"/>
+                <a:ea typeface="맑은 고딕"/>
+                <a:cs typeface="맑은 고딕"/>
               </a:rPr>
               <a:t>02</a:t>
             </a:r>
@@ -6274,6 +6344,8 @@
                   <a:srgbClr val="14B8A6"/>
                 </a:solidFill>
                 <a:latin typeface="맑은 고딕"/>
+                <a:ea typeface="맑은 고딕"/>
+                <a:cs typeface="맑은 고딕"/>
               </a:rPr>
               <a:t>실습 안내</a:t>
             </a:r>
@@ -6309,6 +6381,8 @@
                   <a:srgbClr val="FFFFFF"/>
                 </a:solidFill>
                 <a:latin typeface="맑은 고딕"/>
+                <a:ea typeface="맑은 고딕"/>
+                <a:cs typeface="맑은 고딕"/>
               </a:rPr>
               <a:t>VM 안내 — 계정 생성 + CLI 연동</a:t>
             </a:r>
@@ -6348,6 +6422,8 @@
                   <a:srgbClr val="0D9488"/>
                 </a:solidFill>
                 <a:latin typeface="맑은 고딕"/>
+                <a:ea typeface="맑은 고딕"/>
+                <a:cs typeface="맑은 고딕"/>
               </a:rPr>
               <a:t>●  </a:t>
             </a:r>
@@ -6357,6 +6433,8 @@
                   <a:srgbClr val="222733"/>
                 </a:solidFill>
                 <a:latin typeface="맑은 고딕"/>
+                <a:ea typeface="맑은 고딕"/>
+                <a:cs typeface="맑은 고딕"/>
               </a:rPr>
               <a:t>개인 VM에서 Terraform Cloud 계정·조직·워크스페이스(cloud-lab) 생성</a:t>
             </a:r>
@@ -6373,6 +6451,8 @@
                   <a:srgbClr val="0D9488"/>
                 </a:solidFill>
                 <a:latin typeface="맑은 고딕"/>
+                <a:ea typeface="맑은 고딕"/>
+                <a:cs typeface="맑은 고딕"/>
               </a:rPr>
               <a:t>●  </a:t>
             </a:r>
@@ -6382,6 +6462,8 @@
                   <a:srgbClr val="222733"/>
                 </a:solidFill>
                 <a:latin typeface="맑은 고딕"/>
+                <a:ea typeface="맑은 고딕"/>
+                <a:cs typeface="맑은 고딕"/>
               </a:rPr>
               <a:t>VM 터미널에서 terraform login 실행 후 브라우저 인증 완료</a:t>
             </a:r>
@@ -6398,6 +6480,8 @@
                   <a:srgbClr val="0D9488"/>
                 </a:solidFill>
                 <a:latin typeface="맑은 고딕"/>
+                <a:ea typeface="맑은 고딕"/>
+                <a:cs typeface="맑은 고딕"/>
               </a:rPr>
               <a:t>●  </a:t>
             </a:r>
@@ -6407,6 +6491,8 @@
                   <a:srgbClr val="222733"/>
                 </a:solidFill>
                 <a:latin typeface="맑은 고딕"/>
+                <a:ea typeface="맑은 고딕"/>
+                <a:cs typeface="맑은 고딕"/>
               </a:rPr>
               <a:t>main.tf에 cloud 블록(조직명·워크스페이스명) 작성 — 아직 apply는 하지 않음(3차시에 진행)</a:t>
             </a:r>
@@ -6423,6 +6509,8 @@
                   <a:srgbClr val="0D9488"/>
                 </a:solidFill>
                 <a:latin typeface="맑은 고딕"/>
+                <a:ea typeface="맑은 고딕"/>
+                <a:cs typeface="맑은 고딕"/>
               </a:rPr>
               <a:t>●  </a:t>
             </a:r>
@@ -6432,6 +6520,8 @@
                   <a:srgbClr val="222733"/>
                 </a:solidFill>
                 <a:latin typeface="맑은 고딕"/>
+                <a:ea typeface="맑은 고딕"/>
+                <a:cs typeface="맑은 고딕"/>
               </a:rPr>
               <a:t>워크스페이스 생성 화면 캡처 제출</a:t>
             </a:r>
@@ -6467,6 +6557,8 @@
                   <a:srgbClr val="5B6373"/>
                 </a:solidFill>
                 <a:latin typeface="맑은 고딕"/>
+                <a:ea typeface="맑은 고딕"/>
+                <a:cs typeface="맑은 고딕"/>
               </a:rPr>
               <a:t>클라우드인프라관리  ·  10주차 2차시</a:t>
             </a:r>
@@ -6502,6 +6594,8 @@
                   <a:srgbClr val="5B6373"/>
                 </a:solidFill>
                 <a:latin typeface="맑은 고딕"/>
+                <a:ea typeface="맑은 고딕"/>
+                <a:cs typeface="맑은 고딕"/>
               </a:rPr>
               <a:t>12 / 14</a:t>
             </a:r>
@@ -6687,6 +6781,8 @@
                   <a:srgbClr val="FFFFFF"/>
                 </a:solidFill>
                 <a:latin typeface="맑은 고딕"/>
+                <a:ea typeface="맑은 고딕"/>
+                <a:cs typeface="맑은 고딕"/>
               </a:rPr>
               <a:t>오늘의 정리</a:t>
             </a:r>
@@ -6740,6 +6836,8 @@
                   <a:srgbClr val="14213D"/>
                 </a:solidFill>
                 <a:latin typeface="맑은 고딕"/>
+                <a:ea typeface="맑은 고딕"/>
+                <a:cs typeface="맑은 고딕"/>
               </a:rPr>
               <a:t>1</a:t>
             </a:r>
@@ -6775,6 +6873,8 @@
                   <a:srgbClr val="FFFFFF"/>
                 </a:solidFill>
                 <a:latin typeface="맑은 고딕"/>
+                <a:ea typeface="맑은 고딕"/>
+                <a:cs typeface="맑은 고딕"/>
               </a:rPr>
               <a:t>워크스페이스는 하나의 인프라 단위(State+변수+실행이력)를 관리하는 Terraform Cloud의 작업 공간이다</a:t>
             </a:r>
@@ -6828,6 +6928,8 @@
                   <a:srgbClr val="14213D"/>
                 </a:solidFill>
                 <a:latin typeface="맑은 고딕"/>
+                <a:ea typeface="맑은 고딕"/>
+                <a:cs typeface="맑은 고딕"/>
               </a:rPr>
               <a:t>2</a:t>
             </a:r>
@@ -6863,6 +6965,8 @@
                   <a:srgbClr val="FFFFFF"/>
                 </a:solidFill>
                 <a:latin typeface="맑은 고딕"/>
+                <a:ea typeface="맑은 고딕"/>
+                <a:cs typeface="맑은 고딕"/>
               </a:rPr>
               <a:t>terraform login으로 CLI와 Terraform Cloud 계정을 연동하고, main.tf의 cloud 블록으로 State 저장 위치를 지정한다</a:t>
             </a:r>
@@ -7004,6 +7108,8 @@
                   <a:srgbClr val="FFFFFF"/>
                 </a:solidFill>
                 <a:latin typeface="맑은 고딕"/>
+                <a:ea typeface="맑은 고딕"/>
+                <a:cs typeface="맑은 고딕"/>
               </a:rPr>
               <a:t>다음 차시 예고</a:t>
             </a:r>
@@ -7039,6 +7145,8 @@
                   <a:srgbClr val="14B8A6"/>
                 </a:solidFill>
                 <a:latin typeface="맑은 고딕"/>
+                <a:ea typeface="맑은 고딕"/>
+                <a:cs typeface="맑은 고딕"/>
               </a:rPr>
               <a:t>다음 차시 예고 — 10주차 3차시</a:t>
             </a:r>
@@ -7074,6 +7182,8 @@
                   <a:srgbClr val="FFFFFF"/>
                 </a:solidFill>
                 <a:latin typeface="맑은 고딕"/>
+                <a:ea typeface="맑은 고딕"/>
+                <a:cs typeface="맑은 고딕"/>
               </a:rPr>
               <a:t>오늘 만든 워크스페이스를 GitHub 저장소와 연결하고, random_pet 리소스로 실제 원격 실행(apply)까지 확인합니다.</a:t>
             </a:r>
@@ -7215,6 +7325,8 @@
                   <a:srgbClr val="14B8A6"/>
                 </a:solidFill>
                 <a:latin typeface="맑은 고딕"/>
+                <a:ea typeface="맑은 고딕"/>
+                <a:cs typeface="맑은 고딕"/>
               </a:rPr>
               <a:t>SESSION OVERVIEW</a:t>
             </a:r>
@@ -7250,6 +7362,8 @@
                   <a:srgbClr val="FFFFFF"/>
                 </a:solidFill>
                 <a:latin typeface="맑은 고딕"/>
+                <a:ea typeface="맑은 고딕"/>
+                <a:cs typeface="맑은 고딕"/>
               </a:rPr>
               <a:t>오늘의 학습 목표</a:t>
             </a:r>
@@ -7289,6 +7403,8 @@
                   <a:srgbClr val="222733"/>
                 </a:solidFill>
                 <a:latin typeface="맑은 고딕"/>
+                <a:ea typeface="맑은 고딕"/>
+                <a:cs typeface="맑은 고딕"/>
               </a:rPr>
               <a:t>1.  Terraform Cloud 계정과 조직(Organization)을 생성한다</a:t>
             </a:r>
@@ -7305,6 +7421,8 @@
                   <a:srgbClr val="222733"/>
                 </a:solidFill>
                 <a:latin typeface="맑은 고딕"/>
+                <a:ea typeface="맑은 고딕"/>
+                <a:cs typeface="맑은 고딕"/>
               </a:rPr>
               <a:t>2.  워크스페이스(Workspace)의 역할을 이해하고 직접 만든다</a:t>
             </a:r>
@@ -7321,6 +7439,8 @@
                   <a:srgbClr val="222733"/>
                 </a:solidFill>
                 <a:latin typeface="맑은 고딕"/>
+                <a:ea typeface="맑은 고딕"/>
+                <a:cs typeface="맑은 고딕"/>
               </a:rPr>
               <a:t>3.  terraform login으로 CLI와 계정을 연동한다</a:t>
             </a:r>
@@ -7356,6 +7476,8 @@
                   <a:srgbClr val="5B6373"/>
                 </a:solidFill>
                 <a:latin typeface="맑은 고딕"/>
+                <a:ea typeface="맑은 고딕"/>
+                <a:cs typeface="맑은 고딕"/>
               </a:rPr>
               <a:t>클라우드인프라관리  ·  10주차 2차시</a:t>
             </a:r>
@@ -7391,6 +7513,8 @@
                   <a:srgbClr val="5B6373"/>
                 </a:solidFill>
                 <a:latin typeface="맑은 고딕"/>
+                <a:ea typeface="맑은 고딕"/>
+                <a:cs typeface="맑은 고딕"/>
               </a:rPr>
               <a:t>02 / 14</a:t>
             </a:r>
@@ -7576,6 +7700,8 @@
                   <a:srgbClr val="14B8A6"/>
                 </a:solidFill>
                 <a:latin typeface="맑은 고딕"/>
+                <a:ea typeface="맑은 고딕"/>
+                <a:cs typeface="맑은 고딕"/>
               </a:rPr>
               <a:t>SESSION OVERVIEW</a:t>
             </a:r>
@@ -7611,6 +7737,8 @@
                   <a:srgbClr val="FFFFFF"/>
                 </a:solidFill>
                 <a:latin typeface="맑은 고딕"/>
+                <a:ea typeface="맑은 고딕"/>
+                <a:cs typeface="맑은 고딕"/>
               </a:rPr>
               <a:t>오늘의 진행 순서</a:t>
             </a:r>
@@ -7822,6 +7950,8 @@
                   <a:srgbClr val="FFFFFF"/>
                 </a:solidFill>
                 <a:latin typeface="맑은 고딕"/>
+                <a:ea typeface="맑은 고딕"/>
+                <a:cs typeface="맑은 고딕"/>
               </a:rPr>
               <a:t>1</a:t>
             </a:r>
@@ -7905,6 +8035,8 @@
                   <a:srgbClr val="14213D"/>
                 </a:solidFill>
                 <a:latin typeface="맑은 고딕"/>
+                <a:ea typeface="맑은 고딕"/>
+                <a:cs typeface="맑은 고딕"/>
               </a:rPr>
               <a:t>개념 설명</a:t>
             </a:r>
@@ -7944,6 +8076,8 @@
                   <a:srgbClr val="222733"/>
                 </a:solidFill>
                 <a:latin typeface="맑은 고딕"/>
+                <a:ea typeface="맑은 고딕"/>
+                <a:cs typeface="맑은 고딕"/>
               </a:rPr>
               <a:t>계정 준비+워크스페이스 강의</a:t>
             </a:r>
@@ -8023,6 +8157,8 @@
                   <a:srgbClr val="FFFFFF"/>
                 </a:solidFill>
                 <a:latin typeface="맑은 고딕"/>
+                <a:ea typeface="맑은 고딕"/>
+                <a:cs typeface="맑은 고딕"/>
               </a:rPr>
               <a:t>2</a:t>
             </a:r>
@@ -8106,6 +8242,8 @@
                   <a:srgbClr val="14213D"/>
                 </a:solidFill>
                 <a:latin typeface="맑은 고딕"/>
+                <a:ea typeface="맑은 고딕"/>
+                <a:cs typeface="맑은 고딕"/>
               </a:rPr>
               <a:t>Killercoda</a:t>
             </a:r>
@@ -8145,6 +8283,8 @@
                   <a:srgbClr val="222733"/>
                 </a:solidFill>
                 <a:latin typeface="맑은 고딕"/>
+                <a:ea typeface="맑은 고딕"/>
+                <a:cs typeface="맑은 고딕"/>
               </a:rPr>
               <a:t>워크스페이스 구조 탐색</a:t>
             </a:r>
@@ -8224,6 +8364,8 @@
                   <a:srgbClr val="FFFFFF"/>
                 </a:solidFill>
                 <a:latin typeface="맑은 고딕"/>
+                <a:ea typeface="맑은 고딕"/>
+                <a:cs typeface="맑은 고딕"/>
               </a:rPr>
               <a:t>3</a:t>
             </a:r>
@@ -8307,6 +8449,8 @@
                   <a:srgbClr val="14213D"/>
                 </a:solidFill>
                 <a:latin typeface="맑은 고딕"/>
+                <a:ea typeface="맑은 고딕"/>
+                <a:cs typeface="맑은 고딕"/>
               </a:rPr>
               <a:t>VM 안내</a:t>
             </a:r>
@@ -8346,6 +8490,8 @@
                   <a:srgbClr val="222733"/>
                 </a:solidFill>
                 <a:latin typeface="맑은 고딕"/>
+                <a:ea typeface="맑은 고딕"/>
+                <a:cs typeface="맑은 고딕"/>
               </a:rPr>
               <a:t>계정 생성+연동 실습 안내</a:t>
             </a:r>
@@ -8425,6 +8571,8 @@
                   <a:srgbClr val="FFFFFF"/>
                 </a:solidFill>
                 <a:latin typeface="맑은 고딕"/>
+                <a:ea typeface="맑은 고딕"/>
+                <a:cs typeface="맑은 고딕"/>
               </a:rPr>
               <a:t>4</a:t>
             </a:r>
@@ -8508,6 +8656,8 @@
                   <a:srgbClr val="14213D"/>
                 </a:solidFill>
                 <a:latin typeface="맑은 고딕"/>
+                <a:ea typeface="맑은 고딕"/>
+                <a:cs typeface="맑은 고딕"/>
               </a:rPr>
               <a:t>결과 제출</a:t>
             </a:r>
@@ -8547,6 +8697,8 @@
                   <a:srgbClr val="222733"/>
                 </a:solidFill>
                 <a:latin typeface="맑은 고딕"/>
+                <a:ea typeface="맑은 고딕"/>
+                <a:cs typeface="맑은 고딕"/>
               </a:rPr>
               <a:t>체크리스트 제출</a:t>
             </a:r>
@@ -8582,6 +8734,8 @@
                   <a:srgbClr val="5B6373"/>
                 </a:solidFill>
                 <a:latin typeface="맑은 고딕"/>
+                <a:ea typeface="맑은 고딕"/>
+                <a:cs typeface="맑은 고딕"/>
               </a:rPr>
               <a:t>클라우드인프라관리  ·  10주차 2차시</a:t>
             </a:r>
@@ -8617,6 +8771,8 @@
                   <a:srgbClr val="5B6373"/>
                 </a:solidFill>
                 <a:latin typeface="맑은 고딕"/>
+                <a:ea typeface="맑은 고딕"/>
+                <a:cs typeface="맑은 고딕"/>
               </a:rPr>
               <a:t>03 / 14</a:t>
             </a:r>
@@ -8820,6 +8976,8 @@
                   <a:srgbClr val="14213D"/>
                 </a:solidFill>
                 <a:latin typeface="맑은 고딕"/>
+                <a:ea typeface="맑은 고딕"/>
+                <a:cs typeface="맑은 고딕"/>
               </a:rPr>
               <a:t>PART 00</a:t>
             </a:r>
@@ -8855,6 +9013,8 @@
                   <a:srgbClr val="FFFFFF"/>
                 </a:solidFill>
                 <a:latin typeface="맑은 고딕"/>
+                <a:ea typeface="맑은 고딕"/>
+                <a:cs typeface="맑은 고딕"/>
               </a:rPr>
               <a:t>계정 준비</a:t>
             </a:r>
@@ -8890,6 +9050,8 @@
                   <a:srgbClr val="C9D3E6"/>
                 </a:solidFill>
                 <a:latin typeface="맑은 고딕"/>
+                <a:ea typeface="맑은 고딕"/>
+                <a:cs typeface="맑은 고딕"/>
               </a:rPr>
               <a:t>3주차 이후 세 번째 외부 서비스 가입</a:t>
             </a:r>
@@ -9049,6 +9211,8 @@
                   <a:srgbClr val="14213D"/>
                 </a:solidFill>
                 <a:latin typeface="맑은 고딕"/>
+                <a:ea typeface="맑은 고딕"/>
+                <a:cs typeface="맑은 고딕"/>
               </a:rPr>
               <a:t>00</a:t>
             </a:r>
@@ -9084,6 +9248,8 @@
                   <a:srgbClr val="14B8A6"/>
                 </a:solidFill>
                 <a:latin typeface="맑은 고딕"/>
+                <a:ea typeface="맑은 고딕"/>
+                <a:cs typeface="맑은 고딕"/>
               </a:rPr>
               <a:t>PART 0 · 계정 준비</a:t>
             </a:r>
@@ -9119,6 +9285,8 @@
                   <a:srgbClr val="FFFFFF"/>
                 </a:solidFill>
                 <a:latin typeface="맑은 고딕"/>
+                <a:ea typeface="맑은 고딕"/>
+                <a:cs typeface="맑은 고딕"/>
               </a:rPr>
               <a:t>Terraform Cloud 가입 단계</a:t>
             </a:r>
@@ -9158,6 +9326,8 @@
                   <a:srgbClr val="222733"/>
                 </a:solidFill>
                 <a:latin typeface="맑은 고딕"/>
+                <a:ea typeface="맑은 고딕"/>
+                <a:cs typeface="맑은 고딕"/>
               </a:rPr>
               <a:t>① app.terraform.io 접속 → 이메일로 회원가입(또는 GitHub 계정으로 가입 가능)</a:t>
             </a:r>
@@ -9174,6 +9344,8 @@
                   <a:srgbClr val="222733"/>
                 </a:solidFill>
                 <a:latin typeface="맑은 고딕"/>
+                <a:ea typeface="맑은 고딕"/>
+                <a:cs typeface="맑은 고딕"/>
               </a:rPr>
               <a:t>② 이메일 인증 완료</a:t>
             </a:r>
@@ -9190,6 +9362,8 @@
                   <a:srgbClr val="222733"/>
                 </a:solidFill>
                 <a:latin typeface="맑은 고딕"/>
+                <a:ea typeface="맑은 고딕"/>
+                <a:cs typeface="맑은 고딕"/>
               </a:rPr>
               <a:t>③ 조직(Organization) 이름 설정 — 개인 실습용이니 본인이 원하는 이름으로</a:t>
             </a:r>
@@ -9206,6 +9380,8 @@
                   <a:srgbClr val="222733"/>
                 </a:solidFill>
                 <a:latin typeface="맑은 고딕"/>
+                <a:ea typeface="맑은 고딕"/>
+                <a:cs typeface="맑은 고딕"/>
               </a:rPr>
               <a:t>④ 워크스페이스 생성 화면까지 진행되면 가입 완료</a:t>
             </a:r>
@@ -9241,6 +9417,8 @@
                   <a:srgbClr val="5B6373"/>
                 </a:solidFill>
                 <a:latin typeface="맑은 고딕"/>
+                <a:ea typeface="맑은 고딕"/>
+                <a:cs typeface="맑은 고딕"/>
               </a:rPr>
               <a:t>클라우드인프라관리  ·  10주차 2차시</a:t>
             </a:r>
@@ -9276,6 +9454,8 @@
                   <a:srgbClr val="5B6373"/>
                 </a:solidFill>
                 <a:latin typeface="맑은 고딕"/>
+                <a:ea typeface="맑은 고딕"/>
+                <a:cs typeface="맑은 고딕"/>
               </a:rPr>
               <a:t>05 / 14</a:t>
             </a:r>
@@ -9479,6 +9659,8 @@
                   <a:srgbClr val="14213D"/>
                 </a:solidFill>
                 <a:latin typeface="맑은 고딕"/>
+                <a:ea typeface="맑은 고딕"/>
+                <a:cs typeface="맑은 고딕"/>
               </a:rPr>
               <a:t>00</a:t>
             </a:r>
@@ -9514,6 +9696,8 @@
                   <a:srgbClr val="14B8A6"/>
                 </a:solidFill>
                 <a:latin typeface="맑은 고딕"/>
+                <a:ea typeface="맑은 고딕"/>
+                <a:cs typeface="맑은 고딕"/>
               </a:rPr>
               <a:t>PART 0 · 계정 준비</a:t>
             </a:r>
@@ -9549,6 +9733,8 @@
                   <a:srgbClr val="FFFFFF"/>
                 </a:solidFill>
                 <a:latin typeface="맑은 고딕"/>
+                <a:ea typeface="맑은 고딕"/>
+                <a:cs typeface="맑은 고딕"/>
               </a:rPr>
               <a:t>가입 중 자주 막히는 부분</a:t>
             </a:r>
@@ -9588,6 +9774,8 @@
                   <a:srgbClr val="0D9488"/>
                 </a:solidFill>
                 <a:latin typeface="맑은 고딕"/>
+                <a:ea typeface="맑은 고딕"/>
+                <a:cs typeface="맑은 고딕"/>
               </a:rPr>
               <a:t>●  </a:t>
             </a:r>
@@ -9597,6 +9785,8 @@
                   <a:srgbClr val="222733"/>
                 </a:solidFill>
                 <a:latin typeface="맑은 고딕"/>
+                <a:ea typeface="맑은 고딕"/>
+                <a:cs typeface="맑은 고딕"/>
               </a:rPr>
               <a:t>이메일 인증 메일이 안 오면 스팸함 확인</a:t>
             </a:r>
@@ -9613,6 +9803,8 @@
                   <a:srgbClr val="0D9488"/>
                 </a:solidFill>
                 <a:latin typeface="맑은 고딕"/>
+                <a:ea typeface="맑은 고딕"/>
+                <a:cs typeface="맑은 고딕"/>
               </a:rPr>
               <a:t>●  </a:t>
             </a:r>
@@ -9622,6 +9814,8 @@
                   <a:srgbClr val="222733"/>
                 </a:solidFill>
                 <a:latin typeface="맑은 고딕"/>
+                <a:ea typeface="맑은 고딕"/>
+                <a:cs typeface="맑은 고딕"/>
               </a:rPr>
               <a:t>조직 이름은 전역에서 고유해야 하므로, 흔한 이름은 이미 사용 중일 수 있음</a:t>
             </a:r>
@@ -9638,6 +9832,8 @@
                   <a:srgbClr val="0D9488"/>
                 </a:solidFill>
                 <a:latin typeface="맑은 고딕"/>
+                <a:ea typeface="맑은 고딕"/>
+                <a:cs typeface="맑은 고딕"/>
               </a:rPr>
               <a:t>●  </a:t>
             </a:r>
@@ -9647,6 +9843,8 @@
                   <a:srgbClr val="222733"/>
                 </a:solidFill>
                 <a:latin typeface="맑은 고딕"/>
+                <a:ea typeface="맑은 고딕"/>
+                <a:cs typeface="맑은 고딕"/>
               </a:rPr>
               <a:t>GitHub 계정으로 가입하면 이후 VCS 연동(3차시)이 더 간편해짐</a:t>
             </a:r>
@@ -9726,6 +9924,8 @@
                   <a:srgbClr val="FFFFFF"/>
                 </a:solidFill>
                 <a:latin typeface="맑은 고딕"/>
+                <a:ea typeface="맑은 고딕"/>
+                <a:cs typeface="맑은 고딕"/>
               </a:rPr>
               <a:t>💡 추천</a:t>
             </a:r>
@@ -9761,6 +9961,8 @@
                   <a:srgbClr val="FFFFFF"/>
                 </a:solidFill>
                 <a:latin typeface="맑은 고딕"/>
+                <a:ea typeface="맑은 고딕"/>
+                <a:cs typeface="맑은 고딕"/>
               </a:rPr>
               <a:t>가능하면 GitHub 계정으로 가입하세요 — 3차시 GitHub 연동이 훨씬 수월해집니다</a:t>
             </a:r>
@@ -9796,6 +9998,8 @@
                   <a:srgbClr val="5B6373"/>
                 </a:solidFill>
                 <a:latin typeface="맑은 고딕"/>
+                <a:ea typeface="맑은 고딕"/>
+                <a:cs typeface="맑은 고딕"/>
               </a:rPr>
               <a:t>클라우드인프라관리  ·  10주차 2차시</a:t>
             </a:r>
@@ -9831,6 +10035,8 @@
                   <a:srgbClr val="5B6373"/>
                 </a:solidFill>
                 <a:latin typeface="맑은 고딕"/>
+                <a:ea typeface="맑은 고딕"/>
+                <a:cs typeface="맑은 고딕"/>
               </a:rPr>
               <a:t>06 / 14</a:t>
             </a:r>
@@ -10034,6 +10240,8 @@
                   <a:srgbClr val="14213D"/>
                 </a:solidFill>
                 <a:latin typeface="맑은 고딕"/>
+                <a:ea typeface="맑은 고딕"/>
+                <a:cs typeface="맑은 고딕"/>
               </a:rPr>
               <a:t>PART 01</a:t>
             </a:r>
@@ -10069,6 +10277,8 @@
                   <a:srgbClr val="FFFFFF"/>
                 </a:solidFill>
                 <a:latin typeface="맑은 고딕"/>
+                <a:ea typeface="맑은 고딕"/>
+                <a:cs typeface="맑은 고딕"/>
               </a:rPr>
               <a:t>워크스페이스란?</a:t>
             </a:r>
@@ -10104,6 +10314,8 @@
                   <a:srgbClr val="C9D3E6"/>
                 </a:solidFill>
                 <a:latin typeface="맑은 고딕"/>
+                <a:ea typeface="맑은 고딕"/>
+                <a:cs typeface="맑은 고딕"/>
               </a:rPr>
               <a:t>Terraform Cloud에서 State가 사는 '공간'</a:t>
             </a:r>
@@ -10263,6 +10475,8 @@
                   <a:srgbClr val="14213D"/>
                 </a:solidFill>
                 <a:latin typeface="맑은 고딕"/>
+                <a:ea typeface="맑은 고딕"/>
+                <a:cs typeface="맑은 고딕"/>
               </a:rPr>
               <a:t>01</a:t>
             </a:r>
@@ -10298,6 +10512,8 @@
                   <a:srgbClr val="14B8A6"/>
                 </a:solidFill>
                 <a:latin typeface="맑은 고딕"/>
+                <a:ea typeface="맑은 고딕"/>
+                <a:cs typeface="맑은 고딕"/>
               </a:rPr>
               <a:t>PART 1 · 워크스페이스</a:t>
             </a:r>
@@ -10333,6 +10549,8 @@
                   <a:srgbClr val="FFFFFF"/>
                 </a:solidFill>
                 <a:latin typeface="맑은 고딕"/>
+                <a:ea typeface="맑은 고딕"/>
+                <a:cs typeface="맑은 고딕"/>
               </a:rPr>
               <a:t>Workspace의 역할</a:t>
             </a:r>
@@ -10372,6 +10590,8 @@
                   <a:srgbClr val="0D9488"/>
                 </a:solidFill>
                 <a:latin typeface="맑은 고딕"/>
+                <a:ea typeface="맑은 고딕"/>
+                <a:cs typeface="맑은 고딕"/>
               </a:rPr>
               <a:t>●  </a:t>
             </a:r>
@@ -10381,6 +10601,8 @@
                   <a:srgbClr val="222733"/>
                 </a:solidFill>
                 <a:latin typeface="맑은 고딕"/>
+                <a:ea typeface="맑은 고딕"/>
+                <a:cs typeface="맑은 고딕"/>
               </a:rPr>
               <a:t>워크스페이스 = 하나의 인프라 단위(State + 변수 + 실행 이력)를 관리하는 작업 공간</a:t>
             </a:r>
@@ -10397,6 +10619,8 @@
                   <a:srgbClr val="0D9488"/>
                 </a:solidFill>
                 <a:latin typeface="맑은 고딕"/>
+                <a:ea typeface="맑은 고딕"/>
+                <a:cs typeface="맑은 고딕"/>
               </a:rPr>
               <a:t>●  </a:t>
             </a:r>
@@ -10406,6 +10630,8 @@
                   <a:srgbClr val="222733"/>
                 </a:solidFill>
                 <a:latin typeface="맑은 고딕"/>
+                <a:ea typeface="맑은 고딕"/>
+                <a:cs typeface="맑은 고딕"/>
               </a:rPr>
               <a:t>코드(main.tf)를 어느 워크스페이스와 연결하느냐에 따라 State가 저장되는 곳이 정해짐</a:t>
             </a:r>
@@ -10422,6 +10648,8 @@
                   <a:srgbClr val="0D9488"/>
                 </a:solidFill>
                 <a:latin typeface="맑은 고딕"/>
+                <a:ea typeface="맑은 고딕"/>
+                <a:cs typeface="맑은 고딕"/>
               </a:rPr>
               <a:t>●  </a:t>
             </a:r>
@@ -10431,6 +10659,8 @@
                   <a:srgbClr val="222733"/>
                 </a:solidFill>
                 <a:latin typeface="맑은 고딕"/>
+                <a:ea typeface="맑은 고딕"/>
+                <a:cs typeface="맑은 고딕"/>
               </a:rPr>
               <a:t>오늘은 cloud-lab이라는 이름으로 워크스페이스를 하나 만듭니다</a:t>
             </a:r>
@@ -10466,6 +10696,8 @@
                   <a:srgbClr val="14213D"/>
                 </a:solidFill>
                 <a:latin typeface="맑은 고딕"/>
+                <a:ea typeface="맑은 고딕"/>
+                <a:cs typeface="맑은 고딕"/>
               </a:rPr>
               <a:t>조직과 워크스페이스 구조</a:t>
             </a:r>
@@ -10545,6 +10777,8 @@
                   <a:srgbClr val="FFFFFF"/>
                 </a:solidFill>
                 <a:latin typeface="맑은 고딕"/>
+                <a:ea typeface="맑은 고딕"/>
+                <a:cs typeface="맑은 고딕"/>
               </a:rPr>
               <a:t>조직(Organization)</a:t>
             </a:r>
@@ -10624,6 +10858,8 @@
                   <a:srgbClr val="FFFFFF"/>
                 </a:solidFill>
                 <a:latin typeface="맑은 고딕"/>
+                <a:ea typeface="맑은 고딕"/>
+                <a:cs typeface="맑은 고딕"/>
               </a:rPr>
               <a:t>└ 워크스페이스: cloud-lab</a:t>
             </a:r>
@@ -10703,6 +10939,8 @@
                   <a:srgbClr val="FFFFFF"/>
                 </a:solidFill>
                 <a:latin typeface="맑은 고딕"/>
+                <a:ea typeface="맑은 고딕"/>
+                <a:cs typeface="맑은 고딕"/>
               </a:rPr>
               <a:t>    └ State + 변수 + Runs 이력</a:t>
             </a:r>
@@ -10738,6 +10976,8 @@
                   <a:srgbClr val="5B6373"/>
                 </a:solidFill>
                 <a:latin typeface="맑은 고딕"/>
+                <a:ea typeface="맑은 고딕"/>
+                <a:cs typeface="맑은 고딕"/>
               </a:rPr>
               <a:t>클라우드인프라관리  ·  10주차 2차시</a:t>
             </a:r>
@@ -10773,6 +11013,8 @@
                   <a:srgbClr val="5B6373"/>
                 </a:solidFill>
                 <a:latin typeface="맑은 고딕"/>
+                <a:ea typeface="맑은 고딕"/>
+                <a:cs typeface="맑은 고딕"/>
               </a:rPr>
               <a:t>08 / 14</a:t>
             </a:r>
@@ -10976,6 +11218,8 @@
                   <a:srgbClr val="14213D"/>
                 </a:solidFill>
                 <a:latin typeface="맑은 고딕"/>
+                <a:ea typeface="맑은 고딕"/>
+                <a:cs typeface="맑은 고딕"/>
               </a:rPr>
               <a:t>01</a:t>
             </a:r>
@@ -11011,6 +11255,8 @@
                   <a:srgbClr val="14B8A6"/>
                 </a:solidFill>
                 <a:latin typeface="맑은 고딕"/>
+                <a:ea typeface="맑은 고딕"/>
+                <a:cs typeface="맑은 고딕"/>
               </a:rPr>
               <a:t>PART 1 · 워크스페이스</a:t>
             </a:r>
@@ -11046,6 +11292,8 @@
                   <a:srgbClr val="FFFFFF"/>
                 </a:solidFill>
                 <a:latin typeface="맑은 고딕"/>
+                <a:ea typeface="맑은 고딕"/>
+                <a:cs typeface="맑은 고딕"/>
               </a:rPr>
               <a:t>terraform login — CLI와 계정 연동</a:t>
             </a:r>
@@ -11085,6 +11333,8 @@
                   <a:srgbClr val="0D9488"/>
                 </a:solidFill>
                 <a:latin typeface="맑은 고딕"/>
+                <a:ea typeface="맑은 고딕"/>
+                <a:cs typeface="맑은 고딕"/>
               </a:rPr>
               <a:t>●  </a:t>
             </a:r>
@@ -11094,6 +11344,8 @@
                   <a:srgbClr val="222733"/>
                 </a:solidFill>
                 <a:latin typeface="맑은 고딕"/>
+                <a:ea typeface="맑은 고딕"/>
+                <a:cs typeface="맑은 고딕"/>
               </a:rPr>
               <a:t>terraform login 명령을 실행하면 브라우저가 열리며 토큰 인증 진행</a:t>
             </a:r>
@@ -11110,6 +11362,8 @@
                   <a:srgbClr val="0D9488"/>
                 </a:solidFill>
                 <a:latin typeface="맑은 고딕"/>
+                <a:ea typeface="맑은 고딕"/>
+                <a:cs typeface="맑은 고딕"/>
               </a:rPr>
               <a:t>●  </a:t>
             </a:r>
@@ -11119,6 +11373,8 @@
                   <a:srgbClr val="222733"/>
                 </a:solidFill>
                 <a:latin typeface="맑은 고딕"/>
+                <a:ea typeface="맑은 고딕"/>
+                <a:cs typeface="맑은 고딕"/>
               </a:rPr>
               <a:t>발급된 토큰은 VM 로컬에 자동 저장되어, 이후 terraform 명령이 내 계정으로 실행됨</a:t>
             </a:r>
@@ -11135,6 +11391,8 @@
                   <a:srgbClr val="0D9488"/>
                 </a:solidFill>
                 <a:latin typeface="맑은 고딕"/>
+                <a:ea typeface="맑은 고딕"/>
+                <a:cs typeface="맑은 고딕"/>
               </a:rPr>
               <a:t>●  </a:t>
             </a:r>
@@ -11144,6 +11402,8 @@
                   <a:srgbClr val="222733"/>
                 </a:solidFill>
                 <a:latin typeface="맑은 고딕"/>
+                <a:ea typeface="맑은 고딕"/>
+                <a:cs typeface="맑은 고딕"/>
               </a:rPr>
               <a:t>이 토큰은 비밀번호와 같으니 다른 사람과 공유하거나 코드에 남기지 않기</a:t>
             </a:r>
@@ -11179,6 +11439,8 @@
                   <a:srgbClr val="5B6373"/>
                 </a:solidFill>
                 <a:latin typeface="맑은 고딕"/>
+                <a:ea typeface="맑은 고딕"/>
+                <a:cs typeface="맑은 고딕"/>
               </a:rPr>
               <a:t>클라우드인프라관리  ·  10주차 2차시</a:t>
             </a:r>
@@ -11214,6 +11476,8 @@
                   <a:srgbClr val="5B6373"/>
                 </a:solidFill>
                 <a:latin typeface="맑은 고딕"/>
+                <a:ea typeface="맑은 고딕"/>
+                <a:cs typeface="맑은 고딕"/>
               </a:rPr>
               <a:t>09 / 14</a:t>
             </a:r>
